--- a/docs/Menduner_项目汇报.pptx
+++ b/docs/Menduner_项目汇报.pptx
@@ -4362,7 +4362,7 @@
                 </a:solidFill>
                 <a:latin typeface="Microsoft YaHei"/>
               </a:rPr>
-              <a:t>后端 445 个测试，前端 66 个测试
+              <a:t>Python 466 个测试，前端 66 个测试
 全部通过</a:t>
             </a:r>
           </a:p>
@@ -4877,7 +4877,7 @@
                 </a:solidFill>
                 <a:latin typeface="Microsoft YaHei"/>
               </a:rPr>
-              <a:t>4 个来源当前采集失败</a:t>
+              <a:t>3 个来源当前采集失败</a:t>
             </a:r>
           </a:p>
         </p:txBody>
@@ -4916,7 +4916,7 @@
                 </a:solidFill>
                 <a:latin typeface="Microsoft YaHei"/>
               </a:rPr>
-              <a:t>政府 SIPAC 页面无可提取事件；苏州文化艺术中心是 JS 空壳；大麦搜索页被 robots.txt 禁止；Subao 抽不出有效日期。原因逐条记录在系统里。</a:t>
+              <a:t>政府 SIPAC 页面无可提取事件；大麦搜索页被 robots.txt 禁止；Subao 抽不出有效日期。原因逐条记录在系统里。两个原本因为前端 JS 渲染而采不到的场馆（苏州国际博览中心、苏州文化艺术中心），已改走它们自己页面调用的公开 JSON 接口，现在正常出数据。</a:t>
             </a:r>
           </a:p>
         </p:txBody>
@@ -4999,7 +4999,7 @@
                 </a:solidFill>
                 <a:latin typeface="Microsoft YaHei"/>
               </a:rPr>
-              <a:t>18 个场馆还没有坐标</a:t>
+              <a:t>19 个场馆还没有坐标</a:t>
             </a:r>
           </a:p>
         </p:txBody>
@@ -5160,7 +5160,7 @@
                 </a:solidFill>
                 <a:latin typeface="Microsoft YaHei"/>
               </a:rPr>
-              <a:t>一个活动要全部事实字段都核验才算通过，人工审核还没做完。字段级已核验为 335 条。</a:t>
+              <a:t>一个活动要全部事实字段都核验才算通过，人工审核还没做完。字段级已核验为 558 条。</a:t>
             </a:r>
           </a:p>
         </p:txBody>
@@ -5885,7 +5885,7 @@
                 </a:solidFill>
                 <a:latin typeface="Microsoft YaHei"/>
               </a:rPr>
-              <a:t>剩余 18 个场馆人工指定坐标，把可绘制活动从 116 条提到接近全覆盖。</a:t>
+              <a:t>剩余 19 个场馆人工指定坐标，把可绘制活动从 101 条提到接近全覆盖。</a:t>
             </a:r>
           </a:p>
         </p:txBody>
@@ -9470,7 +9470,7 @@
                 </a:solidFill>
                 <a:latin typeface="Microsoft YaHei"/>
               </a:rPr>
-              <a:t>13 个来源注册在册，每个都有信任等级、
+              <a:t>14 个来源注册在册，每个都有信任等级、
 采集状态和失败原因。不假装全网都爬过。</a:t>
             </a:r>
           </a:p>
@@ -12405,7 +12405,7 @@
                 </a:solidFill>
                 <a:latin typeface="Microsoft YaHei"/>
               </a:rPr>
-              <a:t>1376 条字段证据中，已核验 335 条（24%），待复核 612 条（44%），缺失 294 条（21%）。</a:t>
+              <a:t>1756 条字段证据中，已核验 558 条（24%），待复核 648 条（44%），缺失 377 条（21%）。</a:t>
             </a:r>
           </a:p>
         </p:txBody>
@@ -14923,7 +14923,7 @@
                 </a:solidFill>
                 <a:latin typeface="Microsoft YaHei"/>
               </a:rPr>
-              <a:t>134</a:t>
+              <a:t>172</a:t>
             </a:r>
           </a:p>
         </p:txBody>
@@ -15295,7 +15295,7 @@
                 </a:solidFill>
                 <a:latin typeface="Microsoft YaHei"/>
               </a:rPr>
-              <a:t>1376</a:t>
+              <a:t>1756</a:t>
             </a:r>
           </a:p>
         </p:txBody>
@@ -15419,7 +15419,7 @@
                 </a:solidFill>
                 <a:latin typeface="Microsoft YaHei"/>
               </a:rPr>
-              <a:t>1848</a:t>
+              <a:t>1404</a:t>
             </a:r>
           </a:p>
         </p:txBody>
@@ -15543,7 +15543,7 @@
                 </a:solidFill>
                 <a:latin typeface="Microsoft YaHei"/>
               </a:rPr>
-              <a:t>116</a:t>
+              <a:t>101</a:t>
             </a:r>
           </a:p>
         </p:txBody>
@@ -15667,7 +15667,7 @@
                 </a:solidFill>
                 <a:latin typeface="Microsoft YaHei"/>
               </a:rPr>
-              <a:t>80</a:t>
+              <a:t>113</a:t>
             </a:r>
           </a:p>
         </p:txBody>
@@ -15869,7 +15869,7 @@
                 </a:solidFill>
                 <a:latin typeface="Microsoft YaHei"/>
               </a:rPr>
-              <a:t>全部来自 13 个注册来源的真实采集，数据库里 0 条 MOCK 数据。</a:t>
+              <a:t>全部来自 14 个注册来源的真实采集，数据库里 0 条 MOCK 数据。</a:t>
             </a:r>
           </a:p>
           <a:p>
